--- a/bench/slides/multicopy_families.pptx
+++ b/bench/slides/multicopy_families.pptx
@@ -17,6 +17,7 @@
     <p:sldId id="265" r:id="rId16"/>
     <p:sldId id="266" r:id="rId17"/>
     <p:sldId id="267" r:id="rId18"/>
+    <p:sldId id="268" r:id="rId19"/>
   </p:sldIdLst>
   <p:sldSz cx="12191695" cy="6858000" type="screen4x3"/>
   <p:notesSz cx="6858000" cy="9144000"/>
@@ -3196,7 +3197,7 @@
                   <a:srgbClr val="787878"/>
                 </a:solidFill>
               </a:rPr>
-              <a:t>gorilla HiFi / Iso-Seq  ·  annotation-free  ·  threshold-free</a:t>
+              <a:t>gorilla HiFi / Iso-Seq  ·  annotation-free  ·  relational (no absolute-similarity bar)</a:t>
             </a:r>
           </a:p>
         </p:txBody>
@@ -3508,7 +3509,7 @@
                   <a:srgbClr val="14285A"/>
                 </a:solidFill>
               </a:rPr>
-              <a:t>Summary</a:t>
+              <a:t>Honest scope &amp; limitations</a:t>
             </a:r>
           </a:p>
         </p:txBody>
@@ -3543,10 +3544,10 @@
             <a:r>
               <a:rPr sz="2200" b="1">
                 <a:solidFill>
-                  <a:srgbClr val="14285A"/>
+                  <a:srgbClr val="C81E1E"/>
                 </a:solidFill>
               </a:rPr>
-              <a:t>•  Definition: a family = a connected component of the read-conflict graph — threshold-free, annotation-free.</a:t>
+              <a:t>•  No single EXTERNAL real-data true-origin accuracy for O2: every real-data route loops through minimap2 or the RNA catalog.</a:t>
             </a:r>
           </a:p>
           <a:p>
@@ -3561,7 +3562,7 @@
                   <a:srgbClr val="141414"/>
                 </a:solidFill>
               </a:rPr>
-              <a:t>•  It picks out exactly the loci where copy assignment is needed; excludes single-copy &amp; domain-sharers by construction.</a:t>
+              <a:t>•  Support is by TRIANGULATION of differently-biased partial witnesses — planted sim (synthetic), DNA-derived signatures (held-out, 2.2× chance), and a source-orthogonal SEDEF segdup map (grouping only).</a:t>
             </a:r>
           </a:p>
           <a:p>
@@ -3571,12 +3572,162 @@
               </a:spcAft>
             </a:pPr>
             <a:r>
+              <a:rPr sz="2200" b="0">
+                <a:solidFill>
+                  <a:srgbClr val="141414"/>
+                </a:solidFill>
+              </a:rPr>
+              <a:t>•  'Silver' (minimap2-primary agreement) is NOT accuracy — it is easy-regime (MAPQ&gt;0) consistency with the very aligner we improve on.</a:t>
+            </a:r>
+          </a:p>
+          <a:p>
+            <a:pPr>
+              <a:spcAft>
+                <a:spcPts val="800"/>
+              </a:spcAft>
+            </a:pPr>
+            <a:r>
+              <a:rPr sz="2200" b="0">
+                <a:solidFill>
+                  <a:srgbClr val="141414"/>
+                </a:solidFill>
+              </a:rPr>
+              <a:t>•  The definition removes the ABSOLUTE-similarity bar but retains tuned constants (δ, de_max, min_reads) — named, not eliminated.</a:t>
+            </a:r>
+          </a:p>
+          <a:p>
+            <a:pPr>
+              <a:spcAft>
+                <a:spcPts val="800"/>
+              </a:spcAft>
+            </a:pPr>
+            <a:r>
               <a:rPr sz="2200" b="1">
                 <a:solidFill>
+                  <a:srgbClr val="14285A"/>
+                </a:solidFill>
+              </a:rPr>
+              <a:t>•  Outstanding: a true-origin external oracle (cluster SEDEF/BISER or gorilla Compara) + DNA parCN for copy-vs-allele.</a:t>
+            </a:r>
+          </a:p>
+        </p:txBody>
+      </p:sp>
+    </p:spTree>
+  </p:cSld>
+  <p:clrMapOvr>
+    <a:masterClrMapping/>
+  </p:clrMapOvr>
+</p:sld>
+</file>
+
+<file path=ppt/slides/slide13.xml><?xml version="1.0" encoding="utf-8"?>
+<p:sld xmlns:a="http://schemas.openxmlformats.org/drawingml/2006/main" xmlns:p="http://schemas.openxmlformats.org/presentationml/2006/main" xmlns:r="http://schemas.openxmlformats.org/officeDocument/2006/relationships">
+  <p:cSld>
+    <p:spTree>
+      <p:nvGrpSpPr>
+        <p:cNvPr id="1" name=""/>
+        <p:cNvGrpSpPr/>
+        <p:nvPr/>
+      </p:nvGrpSpPr>
+      <p:grpSpPr/>
+      <p:sp>
+        <p:nvSpPr>
+          <p:cNvPr id="2" name="TextBox 1"/>
+          <p:cNvSpPr txBox="1"/>
+          <p:nvPr/>
+        </p:nvSpPr>
+        <p:spPr>
+          <a:xfrm>
+            <a:off x="548640" y="274320"/>
+            <a:ext cx="11064240" cy="914400"/>
+          </a:xfrm>
+          <a:prstGeom prst="rect">
+            <a:avLst/>
+          </a:prstGeom>
+          <a:noFill/>
+        </p:spPr>
+        <p:txBody>
+          <a:bodyPr wrap="square">
+            <a:spAutoFit/>
+          </a:bodyPr>
+          <a:lstStyle/>
+          <a:p>
+            <a:pPr algn="l"/>
+            <a:r>
+              <a:rPr sz="3000" b="1" i="0">
+                <a:solidFill>
+                  <a:srgbClr val="14285A"/>
+                </a:solidFill>
+              </a:rPr>
+              <a:t>Summary</a:t>
+            </a:r>
+          </a:p>
+        </p:txBody>
+      </p:sp>
+      <p:sp>
+        <p:nvSpPr>
+          <p:cNvPr id="3" name="TextBox 2"/>
+          <p:cNvSpPr txBox="1"/>
+          <p:nvPr/>
+        </p:nvSpPr>
+        <p:spPr>
+          <a:xfrm>
+            <a:off x="731520" y="1463040"/>
+            <a:ext cx="10698480" cy="4937760"/>
+          </a:xfrm>
+          <a:prstGeom prst="rect">
+            <a:avLst/>
+          </a:prstGeom>
+          <a:noFill/>
+        </p:spPr>
+        <p:txBody>
+          <a:bodyPr wrap="square">
+            <a:spAutoFit/>
+          </a:bodyPr>
+          <a:lstStyle/>
+          <a:p>
+            <a:pPr>
+              <a:spcAft>
+                <a:spcPts val="800"/>
+              </a:spcAft>
+            </a:pPr>
+            <a:r>
+              <a:rPr sz="2200" b="1">
+                <a:solidFill>
+                  <a:srgbClr val="14285A"/>
+                </a:solidFill>
+              </a:rPr>
+              <a:t>•  Definition: a family = a connected component of the read-conflict graph — RELATIONAL (no absolute-similarity bar), annotation-free.</a:t>
+            </a:r>
+          </a:p>
+          <a:p>
+            <a:pPr>
+              <a:spcAft>
+                <a:spcPts val="800"/>
+              </a:spcAft>
+            </a:pPr>
+            <a:r>
+              <a:rPr sz="2200" b="0">
+                <a:solidFill>
+                  <a:srgbClr val="141414"/>
+                </a:solidFill>
+              </a:rPr>
+              <a:t>•  It picks out exactly the loci where copy assignment is needed; excludes single-copy &amp; domain-sharers (with downstream homology guards at scale).</a:t>
+            </a:r>
+          </a:p>
+          <a:p>
+            <a:pPr>
+              <a:spcAft>
+                <a:spcPts val="800"/>
+              </a:spcAft>
+            </a:pPr>
+            <a:r>
+              <a:rPr sz="2200" b="1">
+                <a:solidFill>
                   <a:srgbClr val="147814"/>
                 </a:solidFill>
               </a:rPr>
-              <a:t>•  Corroborated four independent, largely non-circular ways: planted sim, DNA decode, cross-level, error controls.</a:t>
+              <a:t>•  Theory + calibrated gate delivered; abstentions provably the identifiability floor; resolving-power shown on synthetic ground truth + DNA enrichment.</a:t>
             </a:r>
           </a:p>
           <a:p>
@@ -3851,7 +4002,7 @@
                   <a:srgbClr val="C81E1E"/>
                 </a:solidFill>
               </a:rPr>
-              <a:t>•  No similarity cutoff — the boundary is decided by the data, not a threshold.</a:t>
+              <a:t>•  No ABSOLUTE-similarity cutoff — a relational alignment-score tie (with a small tuned tolerance), not a '≥X% identical' bar.</a:t>
             </a:r>
           </a:p>
         </p:txBody>
@@ -3961,7 +4112,7 @@
                   <a:srgbClr val="5A5A5A"/>
                 </a:solidFill>
               </a:rPr>
-              <a:t>Tied loci form families; single-copy genes and domain-sharers (one shared exon, no tie) are correctly left out.</a:t>
+              <a:t>Tied loci form families; single-copy genes and domain-sharers (one shared exon, no tie) are left out. (Downstream homology filters guard residual repeat-bridge over-merges at scale.)</a:t>
             </a:r>
           </a:p>
         </p:txBody>
@@ -4013,7 +4164,7 @@
                   <a:srgbClr val="14285A"/>
                 </a:solidFill>
               </a:rPr>
-              <a:t>Threshold-free: the de-tie criterion</a:t>
+              <a:t>A relational criterion: the de-tie</a:t>
             </a:r>
           </a:p>
         </p:txBody>
@@ -4071,7 +4222,7 @@
                   <a:srgbClr val="5A5A5A"/>
                 </a:solidFill>
               </a:rPr>
-              <a:t>Two placements tie iff their divergences are within δ AND both fit (≤ de_max). The tie IS the data, not a tuned cutoff.</a:t>
+              <a:t>Two placements tie iff their divergences are within δ AND both fit (≤ de_max). Relational, not an absolute similarity bar — δ is a small tuned tolerance, not a similarity cutoff.</a:t>
             </a:r>
           </a:p>
         </p:txBody>
@@ -4326,7 +4477,7 @@
                   <a:srgbClr val="1E50A0"/>
                 </a:solidFill>
               </a:rPr>
-              <a:t>•  DNA-supervised decode — real gorilla data, copies/columns from DNA, held-out CV.</a:t>
+              <a:t>•  DNA-supervised decode — real data; DNA supplies the column allele values (copies from the RNA catalog), held-out CV.</a:t>
             </a:r>
           </a:p>
           <a:p>
@@ -4408,7 +4559,7 @@
                   <a:srgbClr val="14285A"/>
                 </a:solidFill>
               </a:rPr>
-              <a:t>Corroboration 1 — simulated ground truth</a:t>
+              <a:t>Corroboration 1 — SYNTHETIC planted ground truth</a:t>
             </a:r>
           </a:p>
         </p:txBody>
@@ -4466,7 +4617,7 @@
                   <a:srgbClr val="5A5A5A"/>
                 </a:solidFill>
               </a:rPr>
-              <a:t>Plant the genome, label every read, run the unmodified pipeline. 100% accuracy where resolvable; the identical floor certified Tied; zero false merges.</a:t>
+              <a:t>Plant the genome, label every read, run the unmodified pipeline. True-origin labels (the only place real accuracy is measured), but synthetic — tests the mechanism, not real-RNA noise. 100% where resolvable; identical floor certified Tied; 0 false merges.</a:t>
             </a:r>
           </a:p>
         </p:txBody>
@@ -4518,7 +4669,7 @@
                   <a:srgbClr val="14285A"/>
                 </a:solidFill>
               </a:rPr>
-              <a:t>Corroboration 2 — DNA-supervised (non-circular, real data)</a:t>
+              <a:t>Corroboration 2 — DNA-supervised decode (real data)</a:t>
             </a:r>
           </a:p>
         </p:txBody>
@@ -4539,8 +4690,8 @@
         </p:blipFill>
         <p:spPr>
           <a:xfrm>
-            <a:off x="1861383" y="1325880"/>
-            <a:ext cx="8468928" cy="4754880"/>
+            <a:off x="1608053" y="1325880"/>
+            <a:ext cx="8975588" cy="4754880"/>
           </a:xfrm>
           <a:prstGeom prst="rect">
             <a:avLst/>
@@ -4576,7 +4727,7 @@
                   <a:srgbClr val="5A5A5A"/>
                 </a:solidFill>
               </a:rPr>
-              <a:t>Copies &amp; distinguishing columns come from DNA, never from the RNA itself; held-out DNA columns confirm 97.2% of calls.</a:t>
+              <a:t>The distinguishing columns' allele VALUES come from DNA; the copy set is the RNA catalog. Held-out DNA columns confirm 97.2% — a self-consistency / enrichment check (2.2× chance), not external accuracy.</a:t>
             </a:r>
           </a:p>
         </p:txBody>
